--- a/ai-engineering/04-loop-engineering/slides/loop-engineering.pptx
+++ b/ai-engineering/04-loop-engineering/slides/loop-engineering.pptx
@@ -997,7 +997,7 @@
           <a:lstStyle/>
           <a:p>
             <a:r>
-              <a:t>Condensed from templates/checker-prompt.md. The maker does one small change, runs build, lint and tests itself and hands over where to look hardest. The original project-07 prompt told the checker that finding nothing was failure; this version deletes that line.</a:t>
+              <a:t>Condensed from the checker prompt in note 03. The maker does one small change, runs build, lint and tests itself and hands over where to look hardest. The original project-07 prompt told the checker that finding nothing was failure; this version deletes that line.</a:t>
             </a:r>
           </a:p>
           <a:p/>
@@ -1509,7 +1509,7 @@
           <a:lstStyle/>
           <a:p>
             <a:r>
-              <a:t>Three tiers: now and recent read every pass, archive only when needed. Keep memory small. Context drift: when the world changes and the notes don't, the loop acts on a stale picture with full confidence. Date every note. Template: templates/loop-state.md.</a:t>
+              <a:t>Three tiers: now and recent read every pass, archive only when needed. Keep memory small. Context drift: when the world changes and the notes don't, the loop acts on a stale picture with full confidence. Date every note. The full loop-state.md file is in note 05.</a:t>
             </a:r>
           </a:p>
           <a:p/>
@@ -1585,7 +1585,7 @@
           <a:lstStyle/>
           <a:p>
             <a:r>
-              <a:t>Simplified from templates/ralph.sh (the note has the full condensed version with awk comparisons and git clean). Each run starts with a fresh context; the filesystem carries everything between runs.</a:t>
+              <a:t>Simplified from the guarded ralph.sh in note 05 (the full script, with awk comparisons, git clean and a log line per pass). Each run starts with a fresh context; the filesystem carries everything between runs.</a:t>
             </a:r>
           </a:p>
           <a:p/>
@@ -8527,7 +8527,7 @@
       </p:sp>
       <p:pic>
         <p:nvPicPr>
-          <p:cNvPr id="14" name="Picture 13" descr="zhu-2026-decision-points-475495040702865707.jpg"/>
+          <p:cNvPr id="14" name="Picture 13" descr="zhu-jevagentharness-fig3-685493817364947348.jpg"/>
           <p:cNvPicPr>
             <a:picLocks noChangeAspect="1"/>
           </p:cNvPicPr>
@@ -26695,7 +26695,7 @@
       </p:sp>
       <p:pic>
         <p:nvPicPr>
-          <p:cNvPr id="11" name="Picture 10" descr="fig9-1-6274292444642789916.png"/>
+          <p:cNvPr id="11" name="Picture 10" descr="li-ai-agents-in-depth-fig9-1-8732678825692013488.png"/>
           <p:cNvPicPr>
             <a:picLocks noChangeAspect="1"/>
           </p:cNvPicPr>
@@ -29535,7 +29535,7 @@
       </p:sp>
       <p:pic>
         <p:nvPicPr>
-          <p:cNvPr id="14" name="Picture 13" descr="fig9-3-7130637753522572736.png"/>
+          <p:cNvPr id="14" name="Picture 13" descr="li-ai-agents-in-depth-fig9-3-4172704173054850220.png"/>
           <p:cNvPicPr>
             <a:picLocks noChangeAspect="1"/>
           </p:cNvPicPr>
@@ -32608,7 +32608,7 @@
       </p:sp>
       <p:pic>
         <p:nvPicPr>
-          <p:cNvPr id="11" name="Picture 10" descr="chen-2026-plasticity-vs-stability.png"/>
+          <p:cNvPr id="11" name="Picture 10" descr="chen-self-evolving-agents-continual-learners-fig2.png"/>
           <p:cNvPicPr>
             <a:picLocks noChangeAspect="1"/>
           </p:cNvPicPr>
@@ -35186,7 +35186,7 @@
       </p:sp>
       <p:pic>
         <p:nvPicPr>
-          <p:cNvPr id="14" name="Picture 13" descr="zhong-2026-discoveryrsi-results-8944051653032126024.jpg"/>
+          <p:cNvPr id="14" name="Picture 13" descr="zhong-discoveryrsi-fig1-156008798655193200.jpg"/>
           <p:cNvPicPr>
             <a:picLocks noChangeAspect="1"/>
           </p:cNvPicPr>
@@ -37280,7 +37280,7 @@
       </p:sp>
       <p:pic>
         <p:nvPicPr>
-          <p:cNvPr id="11" name="Picture 10" descr="anthropic-agent-loop-7217033336247907795.jpg"/>
+          <p:cNvPr id="11" name="Picture 10" descr="aibuilderclub-anthropic-agent-loop-3824124068041664912.jpg"/>
           <p:cNvPicPr>
             <a:picLocks noChangeAspect="1"/>
           </p:cNvPicPr>
@@ -44874,7 +44874,7 @@
                 </a:solidFill>
                 <a:latin typeface="Helvetica Neue"/>
               </a:rPr>
-              <a:t> practice/01-exercises, 02-trajectory-verifier, 03-self-modifying-agent</a:t>
+              <a:t> practice/exercises, 02-trajectory-verifier, 03-self-modifying-agent</a:t>
             </a:r>
           </a:p>
         </p:txBody>
@@ -44957,7 +44957,7 @@
                 </a:solidFill>
                 <a:latin typeface="Helvetica Neue"/>
               </a:rPr>
-              <a:t>Copy from:</a:t>
+              <a:t>Copy from the notes:</a:t>
             </a:r>
             <a:r>
               <a:rPr sz="2000" i="0" b="0">
@@ -44966,7 +44966,7 @@
                 </a:solidFill>
                 <a:latin typeface="Helvetica Neue"/>
               </a:rPr>
-              <a:t> templates/ — ralph.sh, loop contract, loop state, maker and checker prompts</a:t>
+              <a:t> loop contract (09), loop state and ralph.sh (05), maker and checker prompts (03)</a:t>
             </a:r>
           </a:p>
         </p:txBody>

--- a/ai-engineering/04-loop-engineering/slides/loop-engineering.pptx
+++ b/ai-engineering/04-loop-engineering/slides/loop-engineering.pptx
@@ -2335,7 +2335,7 @@
           <a:lstStyle/>
           <a:p>
             <a:r>
-              <a:t>From practice/02-trajectory-verifier. Preserving experience is not learning from it. The run is rejected if any outcome or process dimension fails, whatever the average says. Over-refusal averages 0.714 and would sail through a scalar threshold.</a:t>
+              <a:t>From Li Exp. 9-1 (worked example in note 08). Preserving experience is not learning from it. The run is rejected if any outcome or process dimension fails, whatever the average says. Over-refusal averages 0.714 and would sail through a scalar threshold.</a:t>
             </a:r>
           </a:p>
           <a:p/>
@@ -8527,7 +8527,7 @@
       </p:sp>
       <p:pic>
         <p:nvPicPr>
-          <p:cNvPr id="14" name="Picture 13" descr="zhu-jevagentharness-fig3-685493817364947348.jpg"/>
+          <p:cNvPr id="14" name="Picture 13" descr="zhu-jevagentharness-fig3-629671813787304185.jpg"/>
           <p:cNvPicPr>
             <a:picLocks noChangeAspect="1"/>
           </p:cNvPicPr>
@@ -26695,7 +26695,7 @@
       </p:sp>
       <p:pic>
         <p:nvPicPr>
-          <p:cNvPr id="11" name="Picture 10" descr="li-ai-agents-in-depth-fig9-1-8732678825692013488.png"/>
+          <p:cNvPr id="11" name="Picture 10" descr="li-ai-agents-in-depth-fig9-1-2750514144080327874.png"/>
           <p:cNvPicPr>
             <a:picLocks noChangeAspect="1"/>
           </p:cNvPicPr>
@@ -29535,7 +29535,7 @@
       </p:sp>
       <p:pic>
         <p:nvPicPr>
-          <p:cNvPr id="14" name="Picture 13" descr="li-ai-agents-in-depth-fig9-3-4172704173054850220.png"/>
+          <p:cNvPr id="14" name="Picture 13" descr="li-ai-agents-in-depth-fig9-3-959503396613078825.png"/>
           <p:cNvPicPr>
             <a:picLocks noChangeAspect="1"/>
           </p:cNvPicPr>
@@ -31447,7 +31447,7 @@
                 </a:solidFill>
                 <a:latin typeface="Helvetica Neue"/>
               </a:rPr>
-              <a:t>practice/03-self-modifying-agent</a:t>
+              <a:t>Li, Exp. 9-6</a:t>
             </a:r>
           </a:p>
         </p:txBody>
@@ -35186,7 +35186,7 @@
       </p:sp>
       <p:pic>
         <p:nvPicPr>
-          <p:cNvPr id="14" name="Picture 13" descr="zhong-discoveryrsi-fig1-156008798655193200.jpg"/>
+          <p:cNvPr id="14" name="Picture 13" descr="zhong-discoveryrsi-fig1-2037382994110944086.jpg"/>
           <p:cNvPicPr>
             <a:picLocks noChangeAspect="1"/>
           </p:cNvPicPr>
@@ -37280,7 +37280,7 @@
       </p:sp>
       <p:pic>
         <p:nvPicPr>
-          <p:cNvPr id="11" name="Picture 10" descr="aibuilderclub-anthropic-agent-loop-3824124068041664912.jpg"/>
+          <p:cNvPr id="11" name="Picture 10" descr="aibuilderclub-anthropic-agent-loop-5400887061550985497.jpg"/>
           <p:cNvPicPr>
             <a:picLocks noChangeAspect="1"/>
           </p:cNvPicPr>
@@ -44874,7 +44874,7 @@
                 </a:solidFill>
                 <a:latin typeface="Helvetica Neue"/>
               </a:rPr>
-              <a:t> practice/exercises, 02-trajectory-verifier, 03-self-modifying-agent</a:t>
+              <a:t> upstream ai-agent-book chapter9 trajectory-verifier and self-modifying-agent (worked through in 08)</a:t>
             </a:r>
           </a:p>
         </p:txBody>

--- a/ai-engineering/04-loop-engineering/slides/loop-engineering.pptx
+++ b/ai-engineering/04-loop-engineering/slides/loop-engineering.pptx
@@ -8527,7 +8527,7 @@
       </p:sp>
       <p:pic>
         <p:nvPicPr>
-          <p:cNvPr id="14" name="Picture 13" descr="zhu-jevagentharness-fig3-629671813787304185.jpg"/>
+          <p:cNvPr id="14" name="Picture 13" descr="zhu-jevagentharness-fig3-2601862796896933029.jpg"/>
           <p:cNvPicPr>
             <a:picLocks noChangeAspect="1"/>
           </p:cNvPicPr>
@@ -26695,7 +26695,7 @@
       </p:sp>
       <p:pic>
         <p:nvPicPr>
-          <p:cNvPr id="11" name="Picture 10" descr="li-ai-agents-in-depth-fig9-1-2750514144080327874.png"/>
+          <p:cNvPr id="11" name="Picture 10" descr="li-ai-agents-in-depth-fig9-1-5801973103280733966.png"/>
           <p:cNvPicPr>
             <a:picLocks noChangeAspect="1"/>
           </p:cNvPicPr>
@@ -29535,7 +29535,7 @@
       </p:sp>
       <p:pic>
         <p:nvPicPr>
-          <p:cNvPr id="14" name="Picture 13" descr="li-ai-agents-in-depth-fig9-3-959503396613078825.png"/>
+          <p:cNvPr id="14" name="Picture 13" descr="li-ai-agents-in-depth-fig9-3-1290239038962889283.png"/>
           <p:cNvPicPr>
             <a:picLocks noChangeAspect="1"/>
           </p:cNvPicPr>
@@ -35186,7 +35186,7 @@
       </p:sp>
       <p:pic>
         <p:nvPicPr>
-          <p:cNvPr id="14" name="Picture 13" descr="zhong-discoveryrsi-fig1-2037382994110944086.jpg"/>
+          <p:cNvPr id="14" name="Picture 13" descr="zhong-discoveryrsi-fig1-7137545459808833996.jpg"/>
           <p:cNvPicPr>
             <a:picLocks noChangeAspect="1"/>
           </p:cNvPicPr>
@@ -37280,7 +37280,7 @@
       </p:sp>
       <p:pic>
         <p:nvPicPr>
-          <p:cNvPr id="11" name="Picture 10" descr="aibuilderclub-anthropic-agent-loop-5400887061550985497.jpg"/>
+          <p:cNvPr id="11" name="Picture 10" descr="aibuilderclub-anthropic-agent-loop-7307021080893492861.jpg"/>
           <p:cNvPicPr>
             <a:picLocks noChangeAspect="1"/>
           </p:cNvPicPr>
